--- a/packages/Dependencies.pptx
+++ b/packages/Dependencies.pptx
@@ -6239,7 +6239,7 @@
           <a:p>
             <a:fld id="{6DD3C254-EB1A-43A9-939A-0227EC6FC929}" type="datetimeFigureOut">
               <a:rPr lang="zh-CN" altLang="en-US" smtClean="0"/>
-              <a:t>2025/5/14</a:t>
+              <a:t>2026/7/28</a:t>
             </a:fld>
             <a:endParaRPr lang="zh-CN" altLang="en-US"/>
           </a:p>
@@ -6439,7 +6439,7 @@
           <a:p>
             <a:fld id="{6DD3C254-EB1A-43A9-939A-0227EC6FC929}" type="datetimeFigureOut">
               <a:rPr lang="zh-CN" altLang="en-US" smtClean="0"/>
-              <a:t>2025/5/14</a:t>
+              <a:t>2026/7/28</a:t>
             </a:fld>
             <a:endParaRPr lang="zh-CN" altLang="en-US"/>
           </a:p>
@@ -6649,7 +6649,7 @@
           <a:p>
             <a:fld id="{6DD3C254-EB1A-43A9-939A-0227EC6FC929}" type="datetimeFigureOut">
               <a:rPr lang="zh-CN" altLang="en-US" smtClean="0"/>
-              <a:t>2025/5/14</a:t>
+              <a:t>2026/7/28</a:t>
             </a:fld>
             <a:endParaRPr lang="zh-CN" altLang="en-US"/>
           </a:p>
@@ -6849,7 +6849,7 @@
           <a:p>
             <a:fld id="{6DD3C254-EB1A-43A9-939A-0227EC6FC929}" type="datetimeFigureOut">
               <a:rPr lang="zh-CN" altLang="en-US" smtClean="0"/>
-              <a:t>2025/5/14</a:t>
+              <a:t>2026/7/28</a:t>
             </a:fld>
             <a:endParaRPr lang="zh-CN" altLang="en-US"/>
           </a:p>
@@ -7125,7 +7125,7 @@
           <a:p>
             <a:fld id="{6DD3C254-EB1A-43A9-939A-0227EC6FC929}" type="datetimeFigureOut">
               <a:rPr lang="zh-CN" altLang="en-US" smtClean="0"/>
-              <a:t>2025/5/14</a:t>
+              <a:t>2026/7/28</a:t>
             </a:fld>
             <a:endParaRPr lang="zh-CN" altLang="en-US"/>
           </a:p>
@@ -7393,7 +7393,7 @@
           <a:p>
             <a:fld id="{6DD3C254-EB1A-43A9-939A-0227EC6FC929}" type="datetimeFigureOut">
               <a:rPr lang="zh-CN" altLang="en-US" smtClean="0"/>
-              <a:t>2025/5/14</a:t>
+              <a:t>2026/7/28</a:t>
             </a:fld>
             <a:endParaRPr lang="zh-CN" altLang="en-US"/>
           </a:p>
@@ -7808,7 +7808,7 @@
           <a:p>
             <a:fld id="{6DD3C254-EB1A-43A9-939A-0227EC6FC929}" type="datetimeFigureOut">
               <a:rPr lang="zh-CN" altLang="en-US" smtClean="0"/>
-              <a:t>2025/5/14</a:t>
+              <a:t>2026/7/28</a:t>
             </a:fld>
             <a:endParaRPr lang="zh-CN" altLang="en-US"/>
           </a:p>
@@ -7950,7 +7950,7 @@
           <a:p>
             <a:fld id="{6DD3C254-EB1A-43A9-939A-0227EC6FC929}" type="datetimeFigureOut">
               <a:rPr lang="zh-CN" altLang="en-US" smtClean="0"/>
-              <a:t>2025/5/14</a:t>
+              <a:t>2026/7/28</a:t>
             </a:fld>
             <a:endParaRPr lang="zh-CN" altLang="en-US"/>
           </a:p>
@@ -8063,7 +8063,7 @@
           <a:p>
             <a:fld id="{6DD3C254-EB1A-43A9-939A-0227EC6FC929}" type="datetimeFigureOut">
               <a:rPr lang="zh-CN" altLang="en-US" smtClean="0"/>
-              <a:t>2025/5/14</a:t>
+              <a:t>2026/7/28</a:t>
             </a:fld>
             <a:endParaRPr lang="zh-CN" altLang="en-US"/>
           </a:p>
@@ -8376,7 +8376,7 @@
           <a:p>
             <a:fld id="{6DD3C254-EB1A-43A9-939A-0227EC6FC929}" type="datetimeFigureOut">
               <a:rPr lang="zh-CN" altLang="en-US" smtClean="0"/>
-              <a:t>2025/5/14</a:t>
+              <a:t>2026/7/28</a:t>
             </a:fld>
             <a:endParaRPr lang="zh-CN" altLang="en-US"/>
           </a:p>
@@ -8665,7 +8665,7 @@
           <a:p>
             <a:fld id="{6DD3C254-EB1A-43A9-939A-0227EC6FC929}" type="datetimeFigureOut">
               <a:rPr lang="zh-CN" altLang="en-US" smtClean="0"/>
-              <a:t>2025/5/14</a:t>
+              <a:t>2026/7/28</a:t>
             </a:fld>
             <a:endParaRPr lang="zh-CN" altLang="en-US"/>
           </a:p>
@@ -8908,7 +8908,7 @@
           <a:p>
             <a:fld id="{6DD3C254-EB1A-43A9-939A-0227EC6FC929}" type="datetimeFigureOut">
               <a:rPr lang="zh-CN" altLang="en-US" smtClean="0"/>
-              <a:t>2025/5/14</a:t>
+              <a:t>2026/7/28</a:t>
             </a:fld>
             <a:endParaRPr lang="zh-CN" altLang="en-US"/>
           </a:p>
@@ -9597,7 +9597,7 @@
         </p:nvSpPr>
         <p:spPr>
           <a:xfrm>
-            <a:off x="1735496" y="3188148"/>
+            <a:off x="205274" y="3228367"/>
             <a:ext cx="2531707" cy="429209"/>
           </a:xfrm>
           <a:prstGeom prst="rect">
@@ -9823,8 +9823,8 @@
         </p:nvCxnSpPr>
         <p:spPr>
           <a:xfrm flipV="1">
-            <a:off x="3001350" y="2799172"/>
-            <a:ext cx="0" cy="388976"/>
+            <a:off x="1471128" y="2799172"/>
+            <a:ext cx="1530222" cy="429195"/>
           </a:xfrm>
           <a:prstGeom prst="straightConnector1">
             <a:avLst/>
@@ -9916,8 +9916,8 @@
         </p:nvCxnSpPr>
         <p:spPr>
           <a:xfrm flipV="1">
-            <a:off x="1471128" y="3617357"/>
-            <a:ext cx="1530222" cy="1334035"/>
+            <a:off x="1471128" y="3657576"/>
+            <a:ext cx="0" cy="1293816"/>
           </a:xfrm>
           <a:prstGeom prst="straightConnector1">
             <a:avLst/>
@@ -9955,7 +9955,7 @@
         </p:nvSpPr>
         <p:spPr>
           <a:xfrm>
-            <a:off x="3309255" y="4086775"/>
+            <a:off x="3309255" y="3228366"/>
             <a:ext cx="2531707" cy="429209"/>
           </a:xfrm>
           <a:prstGeom prst="rect">
@@ -10151,9 +10151,9 @@
           <p:nvPr/>
         </p:nvCxnSpPr>
         <p:spPr>
-          <a:xfrm flipH="1">
-            <a:off x="5840962" y="3442973"/>
-            <a:ext cx="572279" cy="858407"/>
+          <a:xfrm flipH="1" flipV="1">
+            <a:off x="5840962" y="3442971"/>
+            <a:ext cx="572279" cy="2"/>
           </a:xfrm>
           <a:prstGeom prst="straightConnector1">
             <a:avLst/>
@@ -10195,8 +10195,8 @@
         </p:nvCxnSpPr>
         <p:spPr>
           <a:xfrm flipV="1">
-            <a:off x="4575109" y="4515984"/>
-            <a:ext cx="0" cy="435409"/>
+            <a:off x="4575109" y="3657575"/>
+            <a:ext cx="0" cy="1293818"/>
           </a:xfrm>
           <a:prstGeom prst="straightConnector1">
             <a:avLst/>
@@ -10234,8 +10234,8 @@
         </p:nvSpPr>
         <p:spPr>
           <a:xfrm>
-            <a:off x="9467462" y="2399142"/>
-            <a:ext cx="2531707" cy="429209"/>
+            <a:off x="6413238" y="1511296"/>
+            <a:ext cx="2531707" cy="974839"/>
           </a:xfrm>
           <a:prstGeom prst="rect">
             <a:avLst/>
@@ -10266,6 +10266,29 @@
               <a:rPr lang="en-US" altLang="zh-CN" dirty="0" err="1"/>
               <a:t>GacUIWindows</a:t>
             </a:r>
+            <a:endParaRPr lang="en-US" altLang="zh-CN" dirty="0"/>
+          </a:p>
+          <a:p>
+            <a:pPr algn="ctr"/>
+            <a:r>
+              <a:rPr lang="en-US" altLang="zh-CN" dirty="0" err="1"/>
+              <a:t>iGac</a:t>
+            </a:r>
+            <a:r>
+              <a:rPr lang="en-US" altLang="zh-CN" dirty="0"/>
+              <a:t> repo (Cocoa)</a:t>
+            </a:r>
+          </a:p>
+          <a:p>
+            <a:pPr algn="ctr"/>
+            <a:r>
+              <a:rPr lang="en-US" altLang="zh-CN" dirty="0" err="1"/>
+              <a:t>wGac</a:t>
+            </a:r>
+            <a:r>
+              <a:rPr lang="en-US" altLang="zh-CN" dirty="0"/>
+              <a:t> repo (Wayland)</a:t>
+            </a:r>
             <a:endParaRPr lang="zh-CN" altLang="en-US" dirty="0"/>
           </a:p>
         </p:txBody>
@@ -10282,14 +10305,14 @@
           <p:cNvCxnSpPr>
             <a:cxnSpLocks/>
             <a:stCxn id="63" idx="2"/>
-            <a:endCxn id="55" idx="3"/>
+            <a:endCxn id="55" idx="0"/>
           </p:cNvCxnSpPr>
           <p:nvPr/>
         </p:nvCxnSpPr>
         <p:spPr>
-          <a:xfrm flipH="1">
-            <a:off x="8944948" y="2828351"/>
-            <a:ext cx="1788368" cy="614622"/>
+          <a:xfrm>
+            <a:off x="7679092" y="2486135"/>
+            <a:ext cx="3" cy="742233"/>
           </a:xfrm>
           <a:prstGeom prst="straightConnector1">
             <a:avLst/>
@@ -10781,6 +10804,7 @@
             </a:extLst>
           </p:cNvPr>
           <p:cNvCxnSpPr>
+            <a:cxnSpLocks/>
             <a:stCxn id="39" idx="0"/>
             <a:endCxn id="7" idx="3"/>
           </p:cNvCxnSpPr>
@@ -10788,53 +10812,10 @@
         </p:nvCxnSpPr>
         <p:spPr>
           <a:xfrm rot="16200000" flipV="1">
-            <a:off x="3670053" y="3181719"/>
-            <a:ext cx="1502207" cy="307906"/>
+            <a:off x="4099257" y="2752514"/>
+            <a:ext cx="643798" cy="307906"/>
           </a:xfrm>
           <a:prstGeom prst="curvedConnector2">
-            <a:avLst/>
-          </a:prstGeom>
-          <a:ln>
-            <a:tailEnd type="triangle"/>
-          </a:ln>
-        </p:spPr>
-        <p:style>
-          <a:lnRef idx="3">
-            <a:schemeClr val="dk1"/>
-          </a:lnRef>
-          <a:fillRef idx="0">
-            <a:schemeClr val="dk1"/>
-          </a:fillRef>
-          <a:effectRef idx="2">
-            <a:schemeClr val="dk1"/>
-          </a:effectRef>
-          <a:fontRef idx="minor">
-            <a:schemeClr val="tx1"/>
-          </a:fontRef>
-        </p:style>
-      </p:cxnSp>
-      <p:cxnSp>
-        <p:nvCxnSpPr>
-          <p:cNvPr id="68" name="Straight Arrow Connector 67">
-            <a:extLst>
-              <a:ext uri="{FF2B5EF4-FFF2-40B4-BE49-F238E27FC236}">
-                <a16:creationId xmlns:a16="http://schemas.microsoft.com/office/drawing/2014/main" id="{100130B8-D807-4BE4-ADBF-8D1334CE21E9}"/>
-              </a:ext>
-            </a:extLst>
-          </p:cNvPr>
-          <p:cNvCxnSpPr>
-            <a:cxnSpLocks/>
-            <a:stCxn id="55" idx="0"/>
-            <a:endCxn id="18" idx="2"/>
-          </p:cNvCxnSpPr>
-          <p:nvPr/>
-        </p:nvCxnSpPr>
-        <p:spPr>
-          <a:xfrm flipH="1" flipV="1">
-            <a:off x="7679092" y="2927160"/>
-            <a:ext cx="3" cy="301208"/>
-          </a:xfrm>
-          <a:prstGeom prst="straightConnector1">
             <a:avLst/>
           </a:prstGeom>
           <a:ln>
@@ -10900,103 +10881,6 @@
           </a:p>
         </p:txBody>
       </p:sp>
-      <p:sp>
-        <p:nvSpPr>
-          <p:cNvPr id="18" name="Rectangle 17">
-            <a:extLst>
-              <a:ext uri="{FF2B5EF4-FFF2-40B4-BE49-F238E27FC236}">
-                <a16:creationId xmlns:a16="http://schemas.microsoft.com/office/drawing/2014/main" id="{D06F2FBA-81A6-6031-8823-97CCEA0EFA9B}"/>
-              </a:ext>
-            </a:extLst>
-          </p:cNvPr>
-          <p:cNvSpPr/>
-          <p:nvPr/>
-        </p:nvSpPr>
-        <p:spPr>
-          <a:xfrm>
-            <a:off x="6413238" y="2248751"/>
-            <a:ext cx="2531707" cy="678409"/>
-          </a:xfrm>
-          <a:prstGeom prst="rect">
-            <a:avLst/>
-          </a:prstGeom>
-        </p:spPr>
-        <p:style>
-          <a:lnRef idx="2">
-            <a:schemeClr val="accent1">
-              <a:shade val="50000"/>
-            </a:schemeClr>
-          </a:lnRef>
-          <a:fillRef idx="1">
-            <a:schemeClr val="accent1"/>
-          </a:fillRef>
-          <a:effectRef idx="0">
-            <a:schemeClr val="accent1"/>
-          </a:effectRef>
-          <a:fontRef idx="minor">
-            <a:schemeClr val="lt1"/>
-          </a:fontRef>
-        </p:style>
-        <p:txBody>
-          <a:bodyPr rtlCol="0" anchor="ctr"/>
-          <a:lstStyle/>
-          <a:p>
-            <a:pPr algn="ctr"/>
-            <a:r>
-              <a:rPr lang="en-US" altLang="zh-CN" dirty="0" err="1"/>
-              <a:t>VlppParser</a:t>
-            </a:r>
-            <a:r>
-              <a:rPr lang="en-US" altLang="zh-CN" dirty="0"/>
-              <a:t> (deprecating)</a:t>
-            </a:r>
-            <a:endParaRPr lang="zh-CN" altLang="en-US" dirty="0"/>
-          </a:p>
-        </p:txBody>
-      </p:sp>
-      <p:cxnSp>
-        <p:nvCxnSpPr>
-          <p:cNvPr id="21" name="Straight Arrow Connector 20">
-            <a:extLst>
-              <a:ext uri="{FF2B5EF4-FFF2-40B4-BE49-F238E27FC236}">
-                <a16:creationId xmlns:a16="http://schemas.microsoft.com/office/drawing/2014/main" id="{90D74B99-BB72-56C7-B6A8-DA53118A7F5D}"/>
-              </a:ext>
-            </a:extLst>
-          </p:cNvPr>
-          <p:cNvCxnSpPr>
-            <a:cxnSpLocks/>
-            <a:stCxn id="18" idx="1"/>
-            <a:endCxn id="7" idx="3"/>
-          </p:cNvCxnSpPr>
-          <p:nvPr/>
-        </p:nvCxnSpPr>
-        <p:spPr>
-          <a:xfrm flipH="1" flipV="1">
-            <a:off x="4267203" y="2584568"/>
-            <a:ext cx="2146035" cy="3388"/>
-          </a:xfrm>
-          <a:prstGeom prst="straightConnector1">
-            <a:avLst/>
-          </a:prstGeom>
-          <a:ln>
-            <a:tailEnd type="triangle"/>
-          </a:ln>
-        </p:spPr>
-        <p:style>
-          <a:lnRef idx="3">
-            <a:schemeClr val="dk1"/>
-          </a:lnRef>
-          <a:fillRef idx="0">
-            <a:schemeClr val="dk1"/>
-          </a:fillRef>
-          <a:effectRef idx="2">
-            <a:schemeClr val="dk1"/>
-          </a:effectRef>
-          <a:fontRef idx="minor">
-            <a:schemeClr val="tx1"/>
-          </a:fontRef>
-        </p:style>
-      </p:cxnSp>
     </p:spTree>
     <p:extLst>
       <p:ext uri="{BB962C8B-B14F-4D97-AF65-F5344CB8AC3E}">
@@ -17383,13 +17267,8 @@
               <a:pPr algn="ctr"/>
               <a:r>
                 <a:rPr lang="en-US" dirty="0"/>
-                <a:t>Linux/</a:t>
+                <a:t>Linux/Wayland</a:t>
               </a:r>
-              <a:r>
-                <a:rPr lang="en-US" dirty="0" err="1"/>
-                <a:t>Gtk</a:t>
-              </a:r>
-              <a:endParaRPr lang="en-US" dirty="0"/>
             </a:p>
           </p:txBody>
         </p:sp>
@@ -17710,7 +17589,7 @@
           <p:spPr>
             <a:xfrm>
               <a:off x="7004050" y="3134279"/>
-              <a:ext cx="2185214" cy="369332"/>
+              <a:ext cx="2433680" cy="369332"/>
             </a:xfrm>
             <a:prstGeom prst="rect">
               <a:avLst/>
@@ -17725,7 +17604,7 @@
             <a:p>
               <a:r>
                 <a:rPr lang="en-US" dirty="0" err="1"/>
-                <a:t>SetupGtkRenderer</a:t>
+                <a:t>SetupWGacRenderer</a:t>
               </a:r>
               <a:r>
                 <a:rPr lang="en-US" dirty="0"/>
@@ -18021,13 +17900,8 @@
               <a:pPr algn="ctr"/>
               <a:r>
                 <a:rPr lang="en-US" dirty="0"/>
-                <a:t>Linux/</a:t>
+                <a:t>Linux/Wayland</a:t>
               </a:r>
-              <a:r>
-                <a:rPr lang="en-US" dirty="0" err="1"/>
-                <a:t>Gtk</a:t>
-              </a:r>
-              <a:endParaRPr lang="en-US" dirty="0"/>
             </a:p>
           </p:txBody>
         </p:sp>
@@ -18428,6 +18302,84 @@
             </a:fontRef>
           </p:style>
         </p:cxnSp>
+        <p:sp>
+          <p:nvSpPr>
+            <p:cNvPr id="2" name="TextBox 1">
+              <a:extLst>
+                <a:ext uri="{FF2B5EF4-FFF2-40B4-BE49-F238E27FC236}">
+                  <a16:creationId xmlns:a16="http://schemas.microsoft.com/office/drawing/2014/main" id="{EE020840-C40C-46C6-5EE3-AFC59C4A59DE}"/>
+                </a:ext>
+              </a:extLst>
+            </p:cNvPr>
+            <p:cNvSpPr txBox="1"/>
+            <p:nvPr/>
+          </p:nvSpPr>
+          <p:spPr>
+            <a:xfrm>
+              <a:off x="7004050" y="3139558"/>
+              <a:ext cx="3147015" cy="369332"/>
+            </a:xfrm>
+            <a:prstGeom prst="rect">
+              <a:avLst/>
+            </a:prstGeom>
+            <a:noFill/>
+          </p:spPr>
+          <p:txBody>
+            <a:bodyPr wrap="none" rtlCol="0">
+              <a:spAutoFit/>
+            </a:bodyPr>
+            <a:lstStyle/>
+            <a:p>
+              <a:r>
+                <a:rPr lang="en-US" dirty="0" err="1"/>
+                <a:t>SetupWGacHostedRenderer</a:t>
+              </a:r>
+              <a:r>
+                <a:rPr lang="en-US" dirty="0"/>
+                <a:t>();</a:t>
+              </a:r>
+            </a:p>
+          </p:txBody>
+        </p:sp>
+        <p:sp>
+          <p:nvSpPr>
+            <p:cNvPr id="3" name="TextBox 2">
+              <a:extLst>
+                <a:ext uri="{FF2B5EF4-FFF2-40B4-BE49-F238E27FC236}">
+                  <a16:creationId xmlns:a16="http://schemas.microsoft.com/office/drawing/2014/main" id="{A6861015-BDEC-4A1B-D01A-A39E8FA5EC02}"/>
+                </a:ext>
+              </a:extLst>
+            </p:cNvPr>
+            <p:cNvSpPr txBox="1"/>
+            <p:nvPr/>
+          </p:nvSpPr>
+          <p:spPr>
+            <a:xfrm>
+              <a:off x="7004050" y="3780910"/>
+              <a:ext cx="4338047" cy="369332"/>
+            </a:xfrm>
+            <a:prstGeom prst="rect">
+              <a:avLst/>
+            </a:prstGeom>
+            <a:noFill/>
+          </p:spPr>
+          <p:txBody>
+            <a:bodyPr wrap="square" rtlCol="0">
+              <a:spAutoFit/>
+            </a:bodyPr>
+            <a:lstStyle/>
+            <a:p>
+              <a:r>
+                <a:rPr lang="en-US" dirty="0" err="1"/>
+                <a:t>SetupOSXHostedCoreGraphicsRenderer</a:t>
+              </a:r>
+              <a:r>
+                <a:rPr lang="en-US" dirty="0"/>
+                <a:t>();</a:t>
+              </a:r>
+            </a:p>
+          </p:txBody>
+        </p:sp>
       </p:grpSp>
     </p:spTree>
     <p:extLst>
@@ -18676,13 +18628,8 @@
               <a:pPr algn="ctr"/>
               <a:r>
                 <a:rPr lang="en-US" dirty="0"/>
-                <a:t>Linux/</a:t>
+                <a:t>Linux/Wayland</a:t>
               </a:r>
-              <a:r>
-                <a:rPr lang="en-US" dirty="0" err="1"/>
-                <a:t>Gtk</a:t>
-              </a:r>
-              <a:endParaRPr lang="en-US" dirty="0"/>
             </a:p>
           </p:txBody>
         </p:sp>
@@ -19466,6 +19413,84 @@
           </p:txBody>
         </p:sp>
       </p:grpSp>
+      <p:sp>
+        <p:nvSpPr>
+          <p:cNvPr id="13" name="TextBox 12">
+            <a:extLst>
+              <a:ext uri="{FF2B5EF4-FFF2-40B4-BE49-F238E27FC236}">
+                <a16:creationId xmlns:a16="http://schemas.microsoft.com/office/drawing/2014/main" id="{F8B44A14-2623-0748-799A-462CD02039AA}"/>
+              </a:ext>
+            </a:extLst>
+          </p:cNvPr>
+          <p:cNvSpPr txBox="1"/>
+          <p:nvPr/>
+        </p:nvSpPr>
+        <p:spPr>
+          <a:xfrm>
+            <a:off x="7990813" y="5558406"/>
+            <a:ext cx="3147015" cy="369332"/>
+          </a:xfrm>
+          <a:prstGeom prst="rect">
+            <a:avLst/>
+          </a:prstGeom>
+          <a:noFill/>
+        </p:spPr>
+        <p:txBody>
+          <a:bodyPr wrap="none" rtlCol="0">
+            <a:spAutoFit/>
+          </a:bodyPr>
+          <a:lstStyle/>
+          <a:p>
+            <a:r>
+              <a:rPr lang="en-US" dirty="0" err="1"/>
+              <a:t>SetupWGacHostedRenderer</a:t>
+            </a:r>
+            <a:r>
+              <a:rPr lang="en-US" dirty="0"/>
+              <a:t>();</a:t>
+            </a:r>
+          </a:p>
+        </p:txBody>
+      </p:sp>
+      <p:sp>
+        <p:nvSpPr>
+          <p:cNvPr id="16" name="TextBox 15">
+            <a:extLst>
+              <a:ext uri="{FF2B5EF4-FFF2-40B4-BE49-F238E27FC236}">
+                <a16:creationId xmlns:a16="http://schemas.microsoft.com/office/drawing/2014/main" id="{E46C08F8-49BE-8479-3DB0-4F9C14AEF567}"/>
+              </a:ext>
+            </a:extLst>
+          </p:cNvPr>
+          <p:cNvSpPr txBox="1"/>
+          <p:nvPr/>
+        </p:nvSpPr>
+        <p:spPr>
+          <a:xfrm>
+            <a:off x="7990813" y="6207692"/>
+            <a:ext cx="4338047" cy="369332"/>
+          </a:xfrm>
+          <a:prstGeom prst="rect">
+            <a:avLst/>
+          </a:prstGeom>
+          <a:noFill/>
+        </p:spPr>
+        <p:txBody>
+          <a:bodyPr wrap="square" rtlCol="0">
+            <a:spAutoFit/>
+          </a:bodyPr>
+          <a:lstStyle/>
+          <a:p>
+            <a:r>
+              <a:rPr lang="en-US" dirty="0" err="1"/>
+              <a:t>SetupOSXHostedCoreGraphicsRenderer</a:t>
+            </a:r>
+            <a:r>
+              <a:rPr lang="en-US" dirty="0"/>
+              <a:t>();</a:t>
+            </a:r>
+          </a:p>
+        </p:txBody>
+      </p:sp>
     </p:spTree>
     <p:extLst>
       <p:ext uri="{BB962C8B-B14F-4D97-AF65-F5344CB8AC3E}">
@@ -19516,10 +19541,10 @@
         </p:nvGrpSpPr>
         <p:grpSpPr>
           <a:xfrm>
-            <a:off x="2709121" y="2274593"/>
-            <a:ext cx="3675657" cy="937344"/>
-            <a:chOff x="2709121" y="2274593"/>
-            <a:chExt cx="3675657" cy="937344"/>
+            <a:off x="2709121" y="2266364"/>
+            <a:ext cx="3633605" cy="945573"/>
+            <a:chOff x="2709121" y="2266364"/>
+            <a:chExt cx="3633605" cy="945573"/>
           </a:xfrm>
         </p:grpSpPr>
         <p:sp>
@@ -19587,6 +19612,7 @@
               </a:extLst>
             </p:cNvPr>
             <p:cNvCxnSpPr>
+              <a:cxnSpLocks/>
               <a:stCxn id="21" idx="1"/>
               <a:endCxn id="77" idx="1"/>
             </p:cNvCxnSpPr>
@@ -19631,19 +19657,20 @@
               </a:extLst>
             </p:cNvPr>
             <p:cNvCxnSpPr>
+              <a:cxnSpLocks/>
               <a:stCxn id="77" idx="3"/>
               <a:endCxn id="56" idx="3"/>
             </p:cNvCxnSpPr>
             <p:nvPr/>
           </p:nvCxnSpPr>
           <p:spPr>
-            <a:xfrm flipV="1">
-              <a:off x="6342726" y="2274593"/>
-              <a:ext cx="42052" cy="468296"/>
+            <a:xfrm flipH="1" flipV="1">
+              <a:off x="6299445" y="2266364"/>
+              <a:ext cx="43281" cy="476525"/>
             </a:xfrm>
             <a:prstGeom prst="curvedConnector3">
               <a:avLst>
-                <a:gd name="adj1" fmla="val 643613"/>
+                <a:gd name="adj1" fmla="val -528176"/>
               </a:avLst>
             </a:prstGeom>
             <a:ln>
@@ -19763,9 +19790,9 @@
         <p:grpSpPr>
           <a:xfrm>
             <a:off x="52627" y="3027271"/>
-            <a:ext cx="12051661" cy="3774812"/>
+            <a:ext cx="12051661" cy="2758881"/>
             <a:chOff x="52627" y="3027271"/>
-            <a:chExt cx="12051661" cy="3774812"/>
+            <a:chExt cx="12051661" cy="2758881"/>
           </a:xfrm>
         </p:grpSpPr>
         <p:sp>
@@ -19783,7 +19810,7 @@
           <p:spPr>
             <a:xfrm>
               <a:off x="52627" y="3078699"/>
-              <a:ext cx="12051661" cy="3723384"/>
+              <a:ext cx="12051661" cy="2656025"/>
             </a:xfrm>
             <a:prstGeom prst="rect">
               <a:avLst/>
@@ -19835,7 +19862,7 @@
           </p:nvSpPr>
           <p:spPr>
             <a:xfrm>
-              <a:off x="339063" y="4365645"/>
+              <a:off x="313985" y="3225199"/>
               <a:ext cx="1917700" cy="533400"/>
             </a:xfrm>
             <a:prstGeom prst="roundRect">
@@ -19885,7 +19912,7 @@
           </p:nvSpPr>
           <p:spPr>
             <a:xfrm>
-              <a:off x="339063" y="5281639"/>
+              <a:off x="320335" y="4141193"/>
               <a:ext cx="1917700" cy="533400"/>
             </a:xfrm>
             <a:prstGeom prst="roundRect">
@@ -19934,7 +19961,7 @@
           </p:nvSpPr>
           <p:spPr>
             <a:xfrm>
-              <a:off x="145388" y="6197633"/>
+              <a:off x="126660" y="5057187"/>
               <a:ext cx="2317750" cy="533400"/>
             </a:xfrm>
             <a:prstGeom prst="roundRect">
@@ -19969,53 +19996,6 @@
             </a:p>
           </p:txBody>
         </p:sp>
-        <p:sp>
-          <p:nvSpPr>
-            <p:cNvPr id="12" name="TextBox 11">
-              <a:extLst>
-                <a:ext uri="{FF2B5EF4-FFF2-40B4-BE49-F238E27FC236}">
-                  <a16:creationId xmlns:a16="http://schemas.microsoft.com/office/drawing/2014/main" id="{DB00A47A-BFFB-48AA-7857-016082613D2D}"/>
-                </a:ext>
-              </a:extLst>
-            </p:cNvPr>
-            <p:cNvSpPr txBox="1"/>
-            <p:nvPr/>
-          </p:nvSpPr>
-          <p:spPr>
-            <a:xfrm>
-              <a:off x="2709121" y="6279667"/>
-              <a:ext cx="5424883" cy="369332"/>
-            </a:xfrm>
-            <a:prstGeom prst="rect">
-              <a:avLst/>
-            </a:prstGeom>
-            <a:noFill/>
-          </p:spPr>
-          <p:txBody>
-            <a:bodyPr wrap="none" rtlCol="0">
-              <a:spAutoFit/>
-            </a:bodyPr>
-            <a:lstStyle/>
-            <a:p>
-              <a:r>
-                <a:rPr lang="en-US" dirty="0" err="1"/>
-                <a:t>SetupRemoteNativeController</a:t>
-              </a:r>
-              <a:r>
-                <a:rPr lang="en-US" dirty="0"/>
-                <a:t>(</a:t>
-              </a:r>
-              <a:r>
-                <a:rPr lang="en-US" dirty="0" err="1"/>
-                <a:t>IGuiRemoteProtocol</a:t>
-              </a:r>
-              <a:r>
-                <a:rPr lang="en-US" dirty="0"/>
-                <a:t>*);</a:t>
-              </a:r>
-            </a:p>
-          </p:txBody>
-        </p:sp>
         <p:cxnSp>
           <p:nvCxnSpPr>
             <p:cNvPr id="14" name="Connector: Curved 13">
@@ -20026,15 +20006,16 @@
               </a:extLst>
             </p:cNvPr>
             <p:cNvCxnSpPr>
+              <a:cxnSpLocks/>
               <a:stCxn id="20" idx="2"/>
               <a:endCxn id="10" idx="0"/>
             </p:cNvCxnSpPr>
             <p:nvPr/>
           </p:nvCxnSpPr>
           <p:spPr>
-            <a:xfrm rot="5400000">
-              <a:off x="1106616" y="5090342"/>
-              <a:ext cx="382594" cy="12700"/>
+            <a:xfrm rot="16200000" flipH="1">
+              <a:off x="1084713" y="3946721"/>
+              <a:ext cx="382594" cy="6350"/>
             </a:xfrm>
             <a:prstGeom prst="curvedConnector3">
               <a:avLst/>
@@ -20068,6 +20049,7 @@
               </a:extLst>
             </p:cNvPr>
             <p:cNvCxnSpPr>
+              <a:cxnSpLocks/>
               <a:stCxn id="10" idx="2"/>
               <a:endCxn id="11" idx="0"/>
             </p:cNvCxnSpPr>
@@ -20075,7 +20057,7 @@
           </p:nvCxnSpPr>
           <p:spPr>
             <a:xfrm rot="16200000" flipH="1">
-              <a:off x="1109791" y="6003161"/>
+              <a:off x="1091063" y="4862715"/>
               <a:ext cx="382594" cy="6350"/>
             </a:xfrm>
             <a:prstGeom prst="curvedConnector3">
@@ -20102,10 +20084,10 @@
         </p:cxnSp>
         <p:sp>
           <p:nvSpPr>
-            <p:cNvPr id="3" name="TextBox 2">
+            <p:cNvPr id="13" name="TextBox 12">
               <a:extLst>
                 <a:ext uri="{FF2B5EF4-FFF2-40B4-BE49-F238E27FC236}">
-                  <a16:creationId xmlns:a16="http://schemas.microsoft.com/office/drawing/2014/main" id="{0AE8AD24-004D-D1AE-460F-8734022BE910}"/>
+                  <a16:creationId xmlns:a16="http://schemas.microsoft.com/office/drawing/2014/main" id="{F13B7F3E-1E1A-F5C4-EAE1-3306C7528763}"/>
                 </a:ext>
               </a:extLst>
             </p:cNvPr>
@@ -20114,7 +20096,54 @@
           </p:nvSpPr>
           <p:spPr>
             <a:xfrm>
-              <a:off x="2709121" y="5815039"/>
+              <a:off x="2709121" y="5350411"/>
+              <a:ext cx="5424883" cy="369332"/>
+            </a:xfrm>
+            <a:prstGeom prst="rect">
+              <a:avLst/>
+            </a:prstGeom>
+            <a:noFill/>
+          </p:spPr>
+          <p:txBody>
+            <a:bodyPr wrap="none" rtlCol="0">
+              <a:spAutoFit/>
+            </a:bodyPr>
+            <a:lstStyle/>
+            <a:p>
+              <a:r>
+                <a:rPr lang="en-US" dirty="0" err="1"/>
+                <a:t>SetupRemoteNativeController</a:t>
+              </a:r>
+              <a:r>
+                <a:rPr lang="en-US" dirty="0"/>
+                <a:t>(</a:t>
+              </a:r>
+              <a:r>
+                <a:rPr lang="en-US" dirty="0" err="1"/>
+                <a:t>IGuiRemoteProtocol</a:t>
+              </a:r>
+              <a:r>
+                <a:rPr lang="en-US" dirty="0"/>
+                <a:t>*);</a:t>
+              </a:r>
+            </a:p>
+          </p:txBody>
+        </p:sp>
+        <p:sp>
+          <p:nvSpPr>
+            <p:cNvPr id="15" name="TextBox 14">
+              <a:extLst>
+                <a:ext uri="{FF2B5EF4-FFF2-40B4-BE49-F238E27FC236}">
+                  <a16:creationId xmlns:a16="http://schemas.microsoft.com/office/drawing/2014/main" id="{5446B715-57EA-0CC3-FCCF-D27BAB21239D}"/>
+                </a:ext>
+              </a:extLst>
+            </p:cNvPr>
+            <p:cNvSpPr txBox="1"/>
+            <p:nvPr/>
+          </p:nvSpPr>
+          <p:spPr>
+            <a:xfrm>
+              <a:off x="2709121" y="4885783"/>
               <a:ext cx="3930884" cy="369332"/>
             </a:xfrm>
             <a:prstGeom prst="rect">
@@ -20138,10 +20167,10 @@
         </p:sp>
         <p:sp>
           <p:nvSpPr>
-            <p:cNvPr id="13" name="TextBox 12">
+            <p:cNvPr id="16" name="TextBox 15">
               <a:extLst>
                 <a:ext uri="{FF2B5EF4-FFF2-40B4-BE49-F238E27FC236}">
-                  <a16:creationId xmlns:a16="http://schemas.microsoft.com/office/drawing/2014/main" id="{F13B7F3E-1E1A-F5C4-EAE1-3306C7528763}"/>
+                  <a16:creationId xmlns:a16="http://schemas.microsoft.com/office/drawing/2014/main" id="{98B76AB7-F3AE-D563-76DA-7A1AD4BFE4B7}"/>
                 </a:ext>
               </a:extLst>
             </p:cNvPr>
@@ -20150,7 +20179,7 @@
           </p:nvSpPr>
           <p:spPr>
             <a:xfrm>
-              <a:off x="2709121" y="5350411"/>
+              <a:off x="2709121" y="4421155"/>
               <a:ext cx="2606804" cy="369332"/>
             </a:xfrm>
             <a:prstGeom prst="rect">
@@ -20168,94 +20197,7 @@
                 <a:rPr lang="en-US" dirty="0" err="1"/>
                 <a:t>GuiRemoteProtocolFilter</a:t>
               </a:r>
-              <a:endParaRPr lang="en-US" dirty="0"/>
-            </a:p>
-          </p:txBody>
-        </p:sp>
-        <p:sp>
-          <p:nvSpPr>
-            <p:cNvPr id="15" name="TextBox 14">
-              <a:extLst>
-                <a:ext uri="{FF2B5EF4-FFF2-40B4-BE49-F238E27FC236}">
-                  <a16:creationId xmlns:a16="http://schemas.microsoft.com/office/drawing/2014/main" id="{5446B715-57EA-0CC3-FCCF-D27BAB21239D}"/>
-                </a:ext>
-              </a:extLst>
-            </p:cNvPr>
-            <p:cNvSpPr txBox="1"/>
-            <p:nvPr/>
-          </p:nvSpPr>
-          <p:spPr>
-            <a:xfrm>
-              <a:off x="2709121" y="4885783"/>
-              <a:ext cx="3879588" cy="369332"/>
-            </a:xfrm>
-            <a:prstGeom prst="rect">
-              <a:avLst/>
-            </a:prstGeom>
-            <a:noFill/>
-          </p:spPr>
-          <p:txBody>
-            <a:bodyPr wrap="none" rtlCol="0">
-              <a:spAutoFit/>
-            </a:bodyPr>
-            <a:lstStyle/>
-            <a:p>
-              <a:r>
-                <a:rPr lang="en-US" dirty="0" err="1"/>
-                <a:t>GuiRemoteProtocolFromJsonChannel</a:t>
-              </a:r>
-              <a:endParaRPr lang="en-US" dirty="0"/>
-            </a:p>
-          </p:txBody>
-        </p:sp>
-        <p:sp>
-          <p:nvSpPr>
-            <p:cNvPr id="16" name="TextBox 15">
-              <a:extLst>
-                <a:ext uri="{FF2B5EF4-FFF2-40B4-BE49-F238E27FC236}">
-                  <a16:creationId xmlns:a16="http://schemas.microsoft.com/office/drawing/2014/main" id="{98B76AB7-F3AE-D563-76DA-7A1AD4BFE4B7}"/>
-                </a:ext>
-              </a:extLst>
-            </p:cNvPr>
-            <p:cNvSpPr txBox="1"/>
-            <p:nvPr/>
-          </p:nvSpPr>
-          <p:spPr>
-            <a:xfrm>
-              <a:off x="2709121" y="4421155"/>
-              <a:ext cx="6553397" cy="369332"/>
-            </a:xfrm>
-            <a:prstGeom prst="rect">
-              <a:avLst/>
-            </a:prstGeom>
-            <a:noFill/>
-          </p:spPr>
-          <p:txBody>
-            <a:bodyPr wrap="none" rtlCol="0">
-              <a:spAutoFit/>
-            </a:bodyPr>
-            <a:lstStyle/>
-            <a:p>
-              <a:r>
-                <a:rPr lang="en-US" dirty="0" err="1"/>
-                <a:t>GuiRemoteProtocolAsyncChannelSerializer</a:t>
-              </a:r>
-              <a:r>
-                <a:rPr lang="en-US" dirty="0"/>
-                <a:t>&lt;</a:t>
-              </a:r>
-              <a:r>
-                <a:rPr lang="en-US" dirty="0" err="1"/>
-                <a:t>JsonObject</a:t>
-              </a:r>
-              <a:r>
-                <a:rPr lang="en-US" dirty="0"/>
-                <a:t>&gt;  </a:t>
-              </a:r>
-              <a:r>
-                <a:rPr lang="en-US" sz="1200" dirty="0"/>
-                <a:t>(optional)</a:t>
-              </a:r>
+              <a:endParaRPr lang="en-US" sz="1200" dirty="0"/>
             </a:p>
           </p:txBody>
         </p:sp>
@@ -20274,7 +20216,7 @@
           <p:spPr>
             <a:xfrm>
               <a:off x="2709121" y="3956527"/>
-              <a:ext cx="3999813" cy="369332"/>
+              <a:ext cx="2836033" cy="369332"/>
             </a:xfrm>
             <a:prstGeom prst="rect">
               <a:avLst/>
@@ -20289,7 +20231,7 @@
             <a:p>
               <a:r>
                 <a:rPr lang="en-US" dirty="0" err="1"/>
-                <a:t>GuiRemoteJsonChannelStringSerializer</a:t>
+                <a:t>RemotingTestCoreChannel</a:t>
               </a:r>
               <a:endParaRPr lang="en-US" dirty="0"/>
             </a:p>
@@ -20310,7 +20252,7 @@
           <p:spPr>
             <a:xfrm>
               <a:off x="2709121" y="3491899"/>
-              <a:ext cx="5910592" cy="369332"/>
+              <a:ext cx="3943708" cy="369332"/>
             </a:xfrm>
             <a:prstGeom prst="rect">
               <a:avLst/>
@@ -20325,20 +20267,9 @@
             <a:p>
               <a:r>
                 <a:rPr lang="en-US" dirty="0" err="1"/>
-                <a:t>GuiRemoteUtfStringChannelSerializer</a:t>
+                <a:t>GuiRemoteProtocolAsyncJsonChannel</a:t>
               </a:r>
-              <a:r>
-                <a:rPr lang="en-US" dirty="0"/>
-                <a:t>&lt;</a:t>
-              </a:r>
-              <a:r>
-                <a:rPr lang="en-US" dirty="0" err="1"/>
-                <a:t>WString</a:t>
-              </a:r>
-              <a:r>
-                <a:rPr lang="en-US" dirty="0"/>
-                <a:t>, U8String&gt;</a:t>
-              </a:r>
+              <a:endParaRPr lang="en-US" dirty="0"/>
             </a:p>
           </p:txBody>
         </p:sp>
@@ -20357,7 +20288,7 @@
           <p:spPr>
             <a:xfrm>
               <a:off x="2709121" y="3027271"/>
-              <a:ext cx="6285695" cy="369332"/>
+              <a:ext cx="9188734" cy="369332"/>
             </a:xfrm>
             <a:prstGeom prst="rect">
               <a:avLst/>
@@ -20371,108 +20302,24 @@
             <a:lstStyle/>
             <a:p>
               <a:r>
+                <a:rPr lang="en-US" dirty="0" err="1"/>
+                <a:t>GuiRemoteProtocolNetworkChannelServer</a:t>
+              </a:r>
+              <a:r>
                 <a:rPr lang="en-US" dirty="0"/>
-                <a:t>your </a:t>
+                <a:t>&lt;your </a:t>
               </a:r>
               <a:r>
                 <a:rPr lang="en-US" dirty="0" err="1"/>
-                <a:t>IGuiRemoteProtocolChannel</a:t>
+                <a:t>INetworkProtocolServer</a:t>
               </a:r>
               <a:r>
                 <a:rPr lang="en-US" dirty="0"/>
-                <a:t>&lt;U8String&gt; implementation</a:t>
+                <a:t> implementation&gt;</a:t>
               </a:r>
             </a:p>
           </p:txBody>
         </p:sp>
-        <p:cxnSp>
-          <p:nvCxnSpPr>
-            <p:cNvPr id="23" name="Connector: Curved 22">
-              <a:extLst>
-                <a:ext uri="{FF2B5EF4-FFF2-40B4-BE49-F238E27FC236}">
-                  <a16:creationId xmlns:a16="http://schemas.microsoft.com/office/drawing/2014/main" id="{81227BEA-3757-522B-696C-CBC9773029BE}"/>
-                </a:ext>
-              </a:extLst>
-            </p:cNvPr>
-            <p:cNvCxnSpPr>
-              <a:stCxn id="12" idx="1"/>
-              <a:endCxn id="3" idx="1"/>
-            </p:cNvCxnSpPr>
-            <p:nvPr/>
-          </p:nvCxnSpPr>
-          <p:spPr>
-            <a:xfrm rot="10800000">
-              <a:off x="2709121" y="5999705"/>
-              <a:ext cx="12700" cy="464628"/>
-            </a:xfrm>
-            <a:prstGeom prst="curvedConnector3">
-              <a:avLst>
-                <a:gd name="adj1" fmla="val 1800000"/>
-              </a:avLst>
-            </a:prstGeom>
-            <a:ln>
-              <a:tailEnd type="triangle"/>
-            </a:ln>
-          </p:spPr>
-          <p:style>
-            <a:lnRef idx="1">
-              <a:schemeClr val="accent1"/>
-            </a:lnRef>
-            <a:fillRef idx="0">
-              <a:schemeClr val="accent1"/>
-            </a:fillRef>
-            <a:effectRef idx="0">
-              <a:schemeClr val="accent1"/>
-            </a:effectRef>
-            <a:fontRef idx="minor">
-              <a:schemeClr val="tx1"/>
-            </a:fontRef>
-          </p:style>
-        </p:cxnSp>
-        <p:cxnSp>
-          <p:nvCxnSpPr>
-            <p:cNvPr id="25" name="Connector: Curved 24">
-              <a:extLst>
-                <a:ext uri="{FF2B5EF4-FFF2-40B4-BE49-F238E27FC236}">
-                  <a16:creationId xmlns:a16="http://schemas.microsoft.com/office/drawing/2014/main" id="{335EBB75-3AB3-E6E8-4354-020557B7DB90}"/>
-                </a:ext>
-              </a:extLst>
-            </p:cNvPr>
-            <p:cNvCxnSpPr>
-              <a:stCxn id="3" idx="1"/>
-              <a:endCxn id="13" idx="1"/>
-            </p:cNvCxnSpPr>
-            <p:nvPr/>
-          </p:nvCxnSpPr>
-          <p:spPr>
-            <a:xfrm rot="10800000">
-              <a:off x="2709121" y="5535077"/>
-              <a:ext cx="12700" cy="464628"/>
-            </a:xfrm>
-            <a:prstGeom prst="curvedConnector3">
-              <a:avLst>
-                <a:gd name="adj1" fmla="val 1800000"/>
-              </a:avLst>
-            </a:prstGeom>
-            <a:ln>
-              <a:tailEnd type="triangle"/>
-            </a:ln>
-          </p:spPr>
-          <p:style>
-            <a:lnRef idx="1">
-              <a:schemeClr val="accent1"/>
-            </a:lnRef>
-            <a:fillRef idx="0">
-              <a:schemeClr val="accent1"/>
-            </a:fillRef>
-            <a:effectRef idx="0">
-              <a:schemeClr val="accent1"/>
-            </a:effectRef>
-            <a:fontRef idx="minor">
-              <a:schemeClr val="tx1"/>
-            </a:fontRef>
-          </p:style>
-        </p:cxnSp>
         <p:cxnSp>
           <p:nvCxnSpPr>
             <p:cNvPr id="29" name="Connector: Curved 28">
@@ -20483,6 +20330,7 @@
               </a:extLst>
             </p:cNvPr>
             <p:cNvCxnSpPr>
+              <a:cxnSpLocks/>
               <a:stCxn id="13" idx="1"/>
               <a:endCxn id="15" idx="1"/>
             </p:cNvCxnSpPr>
@@ -20527,6 +20375,7 @@
               </a:extLst>
             </p:cNvPr>
             <p:cNvCxnSpPr>
+              <a:cxnSpLocks/>
               <a:stCxn id="15" idx="1"/>
               <a:endCxn id="16" idx="1"/>
             </p:cNvCxnSpPr>
@@ -20571,6 +20420,7 @@
               </a:extLst>
             </p:cNvPr>
             <p:cNvCxnSpPr>
+              <a:cxnSpLocks/>
               <a:stCxn id="16" idx="1"/>
               <a:endCxn id="17" idx="1"/>
             </p:cNvCxnSpPr>
@@ -20615,6 +20465,7 @@
               </a:extLst>
             </p:cNvPr>
             <p:cNvCxnSpPr>
+              <a:cxnSpLocks/>
               <a:stCxn id="17" idx="1"/>
               <a:endCxn id="19" idx="1"/>
             </p:cNvCxnSpPr>
@@ -20659,6 +20510,7 @@
               </a:extLst>
             </p:cNvPr>
             <p:cNvCxnSpPr>
+              <a:cxnSpLocks/>
               <a:stCxn id="19" idx="1"/>
               <a:endCxn id="21" idx="1"/>
             </p:cNvCxnSpPr>
@@ -20707,7 +20559,7 @@
           </p:nvSpPr>
           <p:spPr>
             <a:xfrm>
-              <a:off x="9834115" y="6207441"/>
+              <a:off x="9834115" y="5201377"/>
               <a:ext cx="2270173" cy="584775"/>
             </a:xfrm>
             <a:prstGeom prst="rect">
@@ -20756,9 +20608,9 @@
         <p:grpSpPr>
           <a:xfrm>
             <a:off x="52627" y="65784"/>
-            <a:ext cx="12051661" cy="2393475"/>
+            <a:ext cx="12051661" cy="2385246"/>
             <a:chOff x="52627" y="65784"/>
-            <a:chExt cx="12051661" cy="2393475"/>
+            <a:chExt cx="12051661" cy="2385246"/>
           </a:xfrm>
         </p:grpSpPr>
         <p:sp>
@@ -20927,7 +20779,7 @@
           </p:nvSpPr>
           <p:spPr>
             <a:xfrm>
-              <a:off x="9678062" y="125437"/>
+              <a:off x="8759232" y="141369"/>
               <a:ext cx="2317750" cy="533400"/>
             </a:xfrm>
             <a:prstGeom prst="roundRect">
@@ -20964,55 +20816,6 @@
         </p:sp>
         <p:sp>
           <p:nvSpPr>
-            <p:cNvPr id="41" name="Rectangle: Rounded Corners 40">
-              <a:extLst>
-                <a:ext uri="{FF2B5EF4-FFF2-40B4-BE49-F238E27FC236}">
-                  <a16:creationId xmlns:a16="http://schemas.microsoft.com/office/drawing/2014/main" id="{C389BF2E-3199-9AB7-4CB8-7A2CDE53A3D6}"/>
-                </a:ext>
-              </a:extLst>
-            </p:cNvPr>
-            <p:cNvSpPr/>
-            <p:nvPr/>
-          </p:nvSpPr>
-          <p:spPr>
-            <a:xfrm>
-              <a:off x="7163488" y="125437"/>
-              <a:ext cx="2317750" cy="533400"/>
-            </a:xfrm>
-            <a:prstGeom prst="roundRect">
-              <a:avLst/>
-            </a:prstGeom>
-          </p:spPr>
-          <p:style>
-            <a:lnRef idx="2">
-              <a:schemeClr val="accent6">
-                <a:shade val="15000"/>
-              </a:schemeClr>
-            </a:lnRef>
-            <a:fillRef idx="1">
-              <a:schemeClr val="accent6"/>
-            </a:fillRef>
-            <a:effectRef idx="0">
-              <a:schemeClr val="accent6"/>
-            </a:effectRef>
-            <a:fontRef idx="minor">
-              <a:schemeClr val="lt1"/>
-            </a:fontRef>
-          </p:style>
-          <p:txBody>
-            <a:bodyPr rtlCol="0" anchor="ctr"/>
-            <a:lstStyle/>
-            <a:p>
-              <a:pPr algn="ctr"/>
-              <a:r>
-                <a:rPr lang="en-US" dirty="0"/>
-                <a:t>Windows/GDI</a:t>
-              </a:r>
-            </a:p>
-          </p:txBody>
-        </p:sp>
-        <p:sp>
-          <p:nvSpPr>
             <p:cNvPr id="43" name="Rectangle: Rounded Corners 42">
               <a:extLst>
                 <a:ext uri="{FF2B5EF4-FFF2-40B4-BE49-F238E27FC236}">
@@ -21025,7 +20828,7 @@
           </p:nvSpPr>
           <p:spPr>
             <a:xfrm>
-              <a:off x="6460005" y="125437"/>
+              <a:off x="8080144" y="125437"/>
               <a:ext cx="506659" cy="533400"/>
             </a:xfrm>
             <a:prstGeom prst="roundRect">
@@ -21070,6 +20873,7 @@
               </a:extLst>
             </p:cNvPr>
             <p:cNvCxnSpPr>
+              <a:cxnSpLocks/>
               <a:stCxn id="39" idx="0"/>
               <a:endCxn id="38" idx="2"/>
             </p:cNvCxnSpPr>
@@ -21114,63 +20918,19 @@
             <p:cNvCxnSpPr>
               <a:cxnSpLocks/>
               <a:stCxn id="38" idx="3"/>
-              <a:endCxn id="40" idx="2"/>
+              <a:endCxn id="40" idx="3"/>
             </p:cNvCxnSpPr>
             <p:nvPr/>
           </p:nvCxnSpPr>
           <p:spPr>
             <a:xfrm flipV="1">
-              <a:off x="10537413" y="658837"/>
-              <a:ext cx="299524" cy="534171"/>
+              <a:off x="10537413" y="408069"/>
+              <a:ext cx="539569" cy="784939"/>
             </a:xfrm>
-            <a:prstGeom prst="curvedConnector2">
-              <a:avLst/>
-            </a:prstGeom>
-            <a:ln w="19050">
-              <a:solidFill>
-                <a:schemeClr val="accent2"/>
-              </a:solidFill>
-              <a:tailEnd type="triangle"/>
-            </a:ln>
-          </p:spPr>
-          <p:style>
-            <a:lnRef idx="1">
-              <a:schemeClr val="accent6"/>
-            </a:lnRef>
-            <a:fillRef idx="0">
-              <a:schemeClr val="accent6"/>
-            </a:fillRef>
-            <a:effectRef idx="0">
-              <a:schemeClr val="accent6"/>
-            </a:effectRef>
-            <a:fontRef idx="minor">
-              <a:schemeClr val="tx1"/>
-            </a:fontRef>
-          </p:style>
-        </p:cxnSp>
-        <p:cxnSp>
-          <p:nvCxnSpPr>
-            <p:cNvPr id="49" name="Connector: Curved 48">
-              <a:extLst>
-                <a:ext uri="{FF2B5EF4-FFF2-40B4-BE49-F238E27FC236}">
-                  <a16:creationId xmlns:a16="http://schemas.microsoft.com/office/drawing/2014/main" id="{84A0A5D7-5D50-608F-82F0-834948A5321F}"/>
-                </a:ext>
-              </a:extLst>
-            </p:cNvPr>
-            <p:cNvCxnSpPr>
-              <a:cxnSpLocks/>
-              <a:stCxn id="38" idx="1"/>
-              <a:endCxn id="41" idx="2"/>
-            </p:cNvCxnSpPr>
-            <p:nvPr/>
-          </p:nvCxnSpPr>
-          <p:spPr>
-            <a:xfrm rot="10800000">
-              <a:off x="8322363" y="658838"/>
-              <a:ext cx="297350" cy="534171"/>
-            </a:xfrm>
-            <a:prstGeom prst="curvedConnector2">
-              <a:avLst/>
+            <a:prstGeom prst="curvedConnector3">
+              <a:avLst>
+                <a:gd name="adj1" fmla="val 142367"/>
+              </a:avLst>
             </a:prstGeom>
             <a:ln w="19050">
               <a:solidFill>
@@ -21212,8 +20972,8 @@
           </p:nvCxnSpPr>
           <p:spPr>
             <a:xfrm rot="10800000">
-              <a:off x="6713335" y="658838"/>
-              <a:ext cx="1906378" cy="534171"/>
+              <a:off x="8333475" y="658838"/>
+              <a:ext cx="286239" cy="534171"/>
             </a:xfrm>
             <a:prstGeom prst="curvedConnector2">
               <a:avLst/>
@@ -21255,8 +21015,8 @@
           </p:nvSpPr>
           <p:spPr>
             <a:xfrm>
-              <a:off x="99083" y="2089927"/>
-              <a:ext cx="6285695" cy="369332"/>
+              <a:off x="1684079" y="2081698"/>
+              <a:ext cx="4615366" cy="369332"/>
             </a:xfrm>
             <a:prstGeom prst="rect">
               <a:avLst/>
@@ -21275,11 +21035,11 @@
               </a:r>
               <a:r>
                 <a:rPr lang="en-US" dirty="0" err="1"/>
-                <a:t>IGuiRemoteProtocolChannel</a:t>
+                <a:t>INetworkProtocolClient</a:t>
               </a:r>
               <a:r>
                 <a:rPr lang="en-US" dirty="0"/>
-                <a:t>&lt;U8String&gt; implementation</a:t>
+                <a:t> implementation</a:t>
               </a:r>
             </a:p>
           </p:txBody>
@@ -21298,8 +21058,8 @@
           </p:nvSpPr>
           <p:spPr>
             <a:xfrm>
-              <a:off x="196866" y="1614355"/>
-              <a:ext cx="6187912" cy="369332"/>
+              <a:off x="2806976" y="1617071"/>
+              <a:ext cx="3494867" cy="369332"/>
             </a:xfrm>
             <a:prstGeom prst="rect">
               <a:avLst/>
@@ -21314,20 +21074,9 @@
             <a:p>
               <a:r>
                 <a:rPr lang="en-US" dirty="0" err="1"/>
-                <a:t>GuiRemoteUtfStringChannelDeserializer</a:t>
+                <a:t>GuiRemoteProtocolChannelClient</a:t>
               </a:r>
-              <a:r>
-                <a:rPr lang="en-US" dirty="0"/>
-                <a:t>&lt;</a:t>
-              </a:r>
-              <a:r>
-                <a:rPr lang="en-US" dirty="0" err="1"/>
-                <a:t>WString</a:t>
-              </a:r>
-              <a:r>
-                <a:rPr lang="en-US" dirty="0"/>
-                <a:t>, U8String&gt;</a:t>
-              </a:r>
+              <a:endParaRPr lang="en-US" dirty="0"/>
             </a:p>
           </p:txBody>
         </p:sp>
@@ -21345,8 +21094,8 @@
           </p:nvSpPr>
           <p:spPr>
             <a:xfrm>
-              <a:off x="2091408" y="1148091"/>
-              <a:ext cx="4253087" cy="369332"/>
+              <a:off x="1454837" y="1160671"/>
+              <a:ext cx="4849404" cy="369332"/>
             </a:xfrm>
             <a:prstGeom prst="rect">
               <a:avLst/>
@@ -21361,7 +21110,7 @@
             <a:p>
               <a:r>
                 <a:rPr lang="en-US" dirty="0" err="1"/>
-                <a:t>GuiRemoteJsonChannelStringDeserializer</a:t>
+                <a:t>GuiRemoteProtocolAsyncJsonChannelRenderer</a:t>
               </a:r>
               <a:endParaRPr lang="en-US" dirty="0"/>
             </a:p>
@@ -21382,7 +21131,7 @@
           <p:spPr>
             <a:xfrm>
               <a:off x="2463138" y="681827"/>
-              <a:ext cx="3879588" cy="369332"/>
+              <a:ext cx="3836307" cy="369332"/>
             </a:xfrm>
             <a:prstGeom prst="rect">
               <a:avLst/>
@@ -21397,7 +21146,7 @@
             <a:p>
               <a:r>
                 <a:rPr lang="en-US" dirty="0" err="1"/>
-                <a:t>GuiRemoteJsonChannelFromProtocol</a:t>
+                <a:t>GuiRemoteProtocolRendererChannel</a:t>
               </a:r>
               <a:endParaRPr lang="en-US" dirty="0"/>
             </a:p>
@@ -21413,6 +21162,7 @@
               </a:extLst>
             </p:cNvPr>
             <p:cNvCxnSpPr>
+              <a:cxnSpLocks/>
               <a:stCxn id="56" idx="3"/>
               <a:endCxn id="57" idx="3"/>
             </p:cNvCxnSpPr>
@@ -21420,12 +21170,12 @@
           </p:nvCxnSpPr>
           <p:spPr>
             <a:xfrm flipV="1">
-              <a:off x="6384778" y="1799021"/>
-              <a:ext cx="12700" cy="475572"/>
+              <a:off x="6299445" y="1801737"/>
+              <a:ext cx="2398" cy="464627"/>
             </a:xfrm>
             <a:prstGeom prst="curvedConnector3">
               <a:avLst>
-                <a:gd name="adj1" fmla="val 1800000"/>
+                <a:gd name="adj1" fmla="val 9632944"/>
               </a:avLst>
             </a:prstGeom>
             <a:ln>
@@ -21457,19 +21207,20 @@
               </a:extLst>
             </p:cNvPr>
             <p:cNvCxnSpPr>
+              <a:cxnSpLocks/>
               <a:stCxn id="57" idx="3"/>
               <a:endCxn id="58" idx="3"/>
             </p:cNvCxnSpPr>
             <p:nvPr/>
           </p:nvCxnSpPr>
           <p:spPr>
-            <a:xfrm flipH="1" flipV="1">
-              <a:off x="6344495" y="1332757"/>
-              <a:ext cx="40283" cy="466264"/>
+            <a:xfrm flipV="1">
+              <a:off x="6301843" y="1345337"/>
+              <a:ext cx="2398" cy="456400"/>
             </a:xfrm>
             <a:prstGeom prst="curvedConnector3">
               <a:avLst>
-                <a:gd name="adj1" fmla="val -567485"/>
+                <a:gd name="adj1" fmla="val 9632944"/>
               </a:avLst>
             </a:prstGeom>
             <a:ln>
@@ -21501,6 +21252,7 @@
               </a:extLst>
             </p:cNvPr>
             <p:cNvCxnSpPr>
+              <a:cxnSpLocks/>
               <a:stCxn id="58" idx="3"/>
               <a:endCxn id="59" idx="3"/>
             </p:cNvCxnSpPr>
@@ -21508,12 +21260,12 @@
           </p:nvCxnSpPr>
           <p:spPr>
             <a:xfrm flipH="1" flipV="1">
-              <a:off x="6342726" y="866493"/>
-              <a:ext cx="1769" cy="466264"/>
+              <a:off x="6299445" y="866493"/>
+              <a:ext cx="4796" cy="478844"/>
             </a:xfrm>
             <a:prstGeom prst="curvedConnector3">
               <a:avLst>
-                <a:gd name="adj1" fmla="val -12922555"/>
+                <a:gd name="adj1" fmla="val -4766472"/>
               </a:avLst>
             </a:prstGeom>
             <a:ln>
@@ -21545,15 +21297,16 @@
               </a:extLst>
             </p:cNvPr>
             <p:cNvCxnSpPr>
-              <a:stCxn id="59" idx="3"/>
+              <a:cxnSpLocks/>
+              <a:stCxn id="58" idx="3"/>
               <a:endCxn id="39" idx="1"/>
             </p:cNvCxnSpPr>
             <p:nvPr/>
           </p:nvCxnSpPr>
           <p:spPr>
             <a:xfrm>
-              <a:off x="6342726" y="866493"/>
-              <a:ext cx="1737418" cy="1127386"/>
+              <a:off x="6304241" y="1345337"/>
+              <a:ext cx="1775903" cy="648542"/>
             </a:xfrm>
             <a:prstGeom prst="curvedConnector3">
               <a:avLst/>
